--- a/decks/englang-rhetoric/englang-rhetoric_ch2_logos-and-analogy.pptx
+++ b/decks/englang-rhetoric/englang-rhetoric_ch2_logos-and-analogy.pptx
@@ -126,29 +126,29 @@
   <p:extLst>
     <p:ext uri="{521415D9-36F7-43E2-AB2F-B90AF26B5E84}">
       <p14:sectionLst xmlns:p14="http://schemas.microsoft.com/office/powerpoint/2010/main">
-        <p14:section name="Opening" id="{e5aa8964-f253-52a1-3373-ef221bf06f8b}">
+        <p14:section name="Opening" id="{2efe3bf1-1648-3996-8f9a-eef7399adecd}">
           <p14:sldIdLst>
             <p14:sldId id="256"/>
           </p14:sldIdLst>
         </p14:section>
-        <p14:section name="Gate" id="{b689c100-e7e0-deb6-93c6-5ee1fee0088b}">
+        <p14:section name="Gate" id="{bbaef066-6f96-5509-abf0-5eba14b6b982}">
           <p14:sldIdLst>
             <p14:sldId id="257"/>
             <p14:sldId id="258"/>
           </p14:sldIdLst>
         </p14:section>
-        <p14:section name="Pre-teach" id="{20261d85-a3ae-3e23-352c-4edfbc570811}">
+        <p14:section name="Pre-teach" id="{a1bac36d-0688-6b77-c4e2-becc41636710}">
           <p14:sldIdLst>
             <p14:sldId id="259"/>
           </p14:sldIdLst>
         </p14:section>
-        <p14:section name="Read-along" id="{fd1edc45-9e57-7099-5910-0b9d2dafc216}">
+        <p14:section name="Read-along" id="{79abb6c5-9541-a1d1-8ff9-21ae0c4914da}">
           <p14:sldIdLst>
             <p14:sldId id="260"/>
             <p14:sldId id="261"/>
           </p14:sldIdLst>
         </p14:section>
-        <p14:section name="Teach" id="{7d85f4c0-14db-1e71-564c-d13bd0b65a65}">
+        <p14:section name="Teach" id="{62caa08b-393f-ad65-fd9b-5c8519e821ad}">
           <p14:sldIdLst>
             <p14:sldId id="262"/>
             <p14:sldId id="263"/>
@@ -158,7 +158,7 @@
             <p14:sldId id="267"/>
           </p14:sldIdLst>
         </p14:section>
-        <p14:section name="Routes" id="{f9f12872-e4de-838c-7a8a-c2cda869d770}">
+        <p14:section name="Routes" id="{60babe0c-8dee-aec8-6271-69bc33aa412d}">
           <p14:sldIdLst>
             <p14:sldId id="268"/>
             <p14:sldId id="269"/>
@@ -166,12 +166,12 @@
             <p14:sldId id="271"/>
           </p14:sldIdLst>
         </p14:section>
-        <p14:section name="Close" id="{4344de1f-5ea4-c770-bbbe-e789533c5101}">
+        <p14:section name="Close" id="{bebeee00-8f9d-1f3b-a7d7-47954196e5af}">
           <p14:sldIdLst>
             <p14:sldId id="272"/>
           </p14:sldIdLst>
         </p14:section>
-        <p14:section name="Answers" id="{1d9f5134-3193-2e95-3b03-9248e1f74f24}">
+        <p14:section name="Answers" id="{553d3fc2-010e-864e-ebb9-65c1b088c051}">
           <p14:sldIdLst>
             <p14:sldId id="273"/>
             <p14:sldId id="274"/>
@@ -1326,7 +1326,7 @@
               <a:rPr lang="en-US" dirty="0"/>
               <a:t>Exit ticket — individual, silent, on a slip or mini-whiteboard. Recall before help: no notes, no lanes, no hints. Collect before pupils leave.
 Question: What is an analogy?
-Answer: D   A comparison made to explain or persuade. An analogy compares two things to explain or persuade by pointing out what they share.
+Answer: A   A comparison made to explain or persuade. An analogy compares two things to explain or persuade by pointing out what they share.
 Source of this question: gate item 1 re-asked (options rotated) — this chapter has no third quick-check module.
 The ebook also holds task 3, "Write your own analogy", for homework or the next lesson's do now.
 Sort the slips: correct → ready to move on; incorrect → start next lesson in the pre-teach group, with the read-along and the Support lane. Same destination next time.</a:t>
@@ -1509,7 +1509,7 @@
             <a:r>
               <a:rPr lang="en-US" dirty="0"/>
               <a:t>Answers — task 2: Spot the strongest logos. Reveal the answer; pupils mark their own work in a different colour, then read the "why" together. Same destination for every lane, so one answer serves the whole class.
-Answer: A   ‘Three hundred and twelve people signed the petition in one weekend.’
+Answer: C   ‘Three hundred and twelve people signed the petition in one weekend.’
 Why: A statistic from a count is checkable proof. Opinions and appeals to imagination persuade in other ways, but they are not logos.
 Ask a Support pupil to explain one step, and a Stretch pupil to share their extension.</a:t>
             </a:r>
@@ -1600,9 +1600,9 @@
             <a:r>
               <a:rPr lang="en-US" dirty="0"/>
               <a:t>Do now — retrieval. Silent, no notes, no help: recall comes before any support. Give about four minutes.
-1. What is an analogy?  →  A   A comparison made to explain or persuade
+1. What is an analogy?  →  B   A comparison made to explain or persuade
 2. Logos can be developed by citing ___, using analogies and constructing logical arguments.  →  facts
-3. Which of these is a historical analogy?  →  A   ‘If we ignore this warning, we will be like the people who ignored the first smoke of the Great Fire of London.’
+3. Which of these is a historical analogy?  →  D   ‘If we ignore this warning, we will be like the people who ignored the first smoke of the Great Fire of London.’
 Circulate: who gets 3/3 (Stretch route), 2/3 (Core), 0–1 (Support)? Use this to route pupils later in the lesson.</a:t>
             </a:r>
             <a:endParaRPr lang="en-US" dirty="0"/>
@@ -1692,7 +1692,7 @@
             <a:r>
               <a:rPr lang="en-US" dirty="0"/>
               <a:t>Answers — exit ticket: Exit ticket. Reveal the answer; pupils mark their own work in a different colour, then read the "why" together. Same destination for every lane, so one answer serves the whole class.
-Answer: D   A comparison made to explain or persuade
+Answer: A   A comparison made to explain or persuade
 Why: An analogy compares two things to explain or persuade by pointing out what they share.
 Ask a Support pupil to explain one step, and a Stretch pupil to share their extension.</a:t>
             </a:r>
@@ -1783,9 +1783,9 @@
             <a:r>
               <a:rPr lang="en-US" dirty="0"/>
               <a:t>Answers — pupils mark their own in a different colour, then hands up for 3/3, 2/3, 1/3.
-1. A   A comparison made to explain or persuade. An analogy compares two things to explain or persuade by pointing out what they share.
+1. B   A comparison made to explain or persuade. An analogy compares two things to explain or persuade by pointing out what they share.
 2. facts. Citing facts is the first and most important way to develop logos.
-3. A   ‘If we ignore this warning, we will be like the people who ignored the first smoke of the Great Fire of London.’. A historical analogy compares something now to a famous event in the past, here the Great Fire of London in 1666.
+3. D   ‘If we ignore this warning, we will be like the people who ignored the first smoke of the Great Fire of London.’. A historical analogy compares something now to a famous event in the past, here the Great Fire of London in 1666.
 Say the route each score points to: 3/3 Stretch, 2/3 Core, 0–1 Support. Pupils may choose to move up.</a:t>
             </a:r>
             <a:endParaRPr lang="en-US" dirty="0"/>
@@ -8415,7 +8415,7 @@
                 <a:ea typeface="Calibri" pitchFamily="34" charset="-122"/>
                 <a:cs typeface="Calibri" pitchFamily="34" charset="-120"/>
               </a:rPr>
-              <a:t>‘Three hundred and twelve people signed the petition in one weekend.’</a:t>
+              <a:t>‘I think the council has got this badly wrong.’</a:t>
             </a:r>
             <a:endParaRPr lang="en-US" sz="2600" dirty="0"/>
           </a:p>
@@ -8489,7 +8489,7 @@
                 <a:ea typeface="Calibri" pitchFamily="34" charset="-122"/>
                 <a:cs typeface="Calibri" pitchFamily="34" charset="-120"/>
               </a:rPr>
-              <a:t>‘I think the council has got this badly wrong.’</a:t>
+              <a:t>‘Three hundred and twelve people signed the petition in one weekend.’</a:t>
             </a:r>
             <a:endParaRPr lang="en-US" sz="2600" dirty="0"/>
           </a:p>
@@ -9893,7 +9893,7 @@
                 <a:ea typeface="Calibri" pitchFamily="34" charset="-122"/>
                 <a:cs typeface="Calibri" pitchFamily="34" charset="-120"/>
               </a:rPr>
-              <a:t>A question that does not need an answer</a:t>
+              <a:t>A comparison made to explain or persuade</a:t>
             </a:r>
             <a:endParaRPr lang="en-US" sz="2400" dirty="0"/>
           </a:p>
@@ -9930,7 +9930,7 @@
                 <a:ea typeface="Calibri" pitchFamily="34" charset="-122"/>
                 <a:cs typeface="Calibri" pitchFamily="34" charset="-120"/>
               </a:rPr>
-              <a:t>A short story about a real event</a:t>
+              <a:t>A question that does not need an answer</a:t>
             </a:r>
             <a:endParaRPr lang="en-US" sz="2400" dirty="0"/>
           </a:p>
@@ -10004,7 +10004,7 @@
                 <a:ea typeface="Calibri" pitchFamily="34" charset="-122"/>
                 <a:cs typeface="Calibri" pitchFamily="34" charset="-120"/>
               </a:rPr>
-              <a:t>A comparison made to explain or persuade</a:t>
+              <a:t>A short story about a real event</a:t>
             </a:r>
             <a:endParaRPr lang="en-US" sz="2400" dirty="0"/>
           </a:p>
@@ -10979,7 +10979,7 @@
                 <a:ea typeface="Cambria" pitchFamily="34" charset="-122"/>
                 <a:cs typeface="Cambria" pitchFamily="34" charset="-120"/>
               </a:rPr>
-              <a:t>A   ‘Three hundred and twelve people signed the petition in one weekend.’</a:t>
+              <a:t>C   ‘Three hundred and twelve people signed the petition in one weekend.’</a:t>
             </a:r>
             <a:endParaRPr lang="en-US" sz="1800" dirty="0"/>
           </a:p>
@@ -11513,7 +11513,7 @@
                 <a:ea typeface="Calibri" pitchFamily="34" charset="-122"/>
                 <a:cs typeface="Calibri" pitchFamily="34" charset="-120"/>
               </a:rPr>
-              <a:t>A comparison made to explain or persuade</a:t>
+              <a:t>A short story about a real event</a:t>
             </a:r>
             <a:endParaRPr lang="en-US" sz="2200" dirty="0"/>
           </a:p>
@@ -11550,7 +11550,7 @@
                 <a:ea typeface="Calibri" pitchFamily="34" charset="-122"/>
                 <a:cs typeface="Calibri" pitchFamily="34" charset="-120"/>
               </a:rPr>
-              <a:t>A question that does not need an answer</a:t>
+              <a:t>A comparison made to explain or persuade</a:t>
             </a:r>
             <a:endParaRPr lang="en-US" sz="2200" dirty="0"/>
           </a:p>
@@ -11587,7 +11587,7 @@
                 <a:ea typeface="Calibri" pitchFamily="34" charset="-122"/>
                 <a:cs typeface="Calibri" pitchFamily="34" charset="-120"/>
               </a:rPr>
-              <a:t>A short story about a real event</a:t>
+              <a:t>A question that does not need an answer</a:t>
             </a:r>
             <a:endParaRPr lang="en-US" sz="2200" dirty="0"/>
           </a:p>
@@ -12026,7 +12026,7 @@
                 <a:ea typeface="Calibri" pitchFamily="34" charset="-122"/>
                 <a:cs typeface="Calibri" pitchFamily="34" charset="-120"/>
               </a:rPr>
-              <a:t>‘If we ignore this warning, we will be like the people who ignored the first smoke of the Great Fire of London.’</a:t>
+              <a:t>‘This town is one big family.’</a:t>
             </a:r>
             <a:endParaRPr lang="en-US" sz="1800" dirty="0"/>
           </a:p>
@@ -12100,7 +12100,7 @@
                 <a:ea typeface="Calibri" pitchFamily="34" charset="-122"/>
                 <a:cs typeface="Calibri" pitchFamily="34" charset="-120"/>
               </a:rPr>
-              <a:t>‘This town is one big family.’</a:t>
+              <a:t>‘Forty per cent of pupils walk to school.’</a:t>
             </a:r>
             <a:endParaRPr lang="en-US" sz="1800" dirty="0"/>
           </a:p>
@@ -12137,7 +12137,7 @@
                 <a:ea typeface="Calibri" pitchFamily="34" charset="-122"/>
                 <a:cs typeface="Calibri" pitchFamily="34" charset="-120"/>
               </a:rPr>
-              <a:t>‘Forty per cent of pupils walk to school.’</a:t>
+              <a:t>‘If we ignore this warning, we will be like the people who ignored the first smoke of the Great Fire of London.’</a:t>
             </a:r>
             <a:endParaRPr lang="en-US" sz="1800" dirty="0"/>
           </a:p>
@@ -12476,7 +12476,7 @@
                 <a:ea typeface="Cambria" pitchFamily="34" charset="-122"/>
                 <a:cs typeface="Cambria" pitchFamily="34" charset="-120"/>
               </a:rPr>
-              <a:t>D   A comparison made to explain or persuade</a:t>
+              <a:t>A   A comparison made to explain or persuade</a:t>
             </a:r>
             <a:endParaRPr lang="en-US" sz="1800" dirty="0"/>
           </a:p>
@@ -12997,7 +12997,7 @@
                 <a:ea typeface="Calibri" pitchFamily="34" charset="-122"/>
                 <a:cs typeface="Calibri" pitchFamily="34" charset="-120"/>
               </a:rPr>
-              <a:t>A   A comparison made to explain or persuade</a:t>
+              <a:t>B   A comparison made to explain or persuade</a:t>
             </a:r>
             <a:endParaRPr lang="en-US" sz="2200" dirty="0"/>
           </a:p>
@@ -13497,7 +13497,7 @@
                 <a:ea typeface="Calibri" pitchFamily="34" charset="-122"/>
                 <a:cs typeface="Calibri" pitchFamily="34" charset="-120"/>
               </a:rPr>
-              <a:t>A   ‘If we ignore this warning, we will be like the people who ignored the first smoke of the Great Fire of London.’</a:t>
+              <a:t>D   ‘If we ignore this warning, we will be like the people who ignored the first smoke of the Great Fire of London.’</a:t>
             </a:r>
             <a:endParaRPr lang="en-US" sz="2200" dirty="0"/>
           </a:p>

--- a/decks/englang-rhetoric/englang-rhetoric_ch2_logos-and-analogy.pptx
+++ b/decks/englang-rhetoric/englang-rhetoric_ch2_logos-and-analogy.pptx
@@ -126,29 +126,29 @@
   <p:extLst>
     <p:ext uri="{521415D9-36F7-43E2-AB2F-B90AF26B5E84}">
       <p14:sectionLst xmlns:p14="http://schemas.microsoft.com/office/powerpoint/2010/main">
-        <p14:section name="Opening" id="{2efe3bf1-1648-3996-8f9a-eef7399adecd}">
+        <p14:section name="Opening" id="{80ac53bd-b3f6-3208-4acf-48655598d406}">
           <p14:sldIdLst>
             <p14:sldId id="256"/>
           </p14:sldIdLst>
         </p14:section>
-        <p14:section name="Gate" id="{bbaef066-6f96-5509-abf0-5eba14b6b982}">
+        <p14:section name="Gate" id="{dd514044-30bb-617b-fd04-3cf457ce6a3e}">
           <p14:sldIdLst>
             <p14:sldId id="257"/>
             <p14:sldId id="258"/>
           </p14:sldIdLst>
         </p14:section>
-        <p14:section name="Pre-teach" id="{a1bac36d-0688-6b77-c4e2-becc41636710}">
+        <p14:section name="Pre-teach" id="{1d18d49c-e54f-39f2-6dd6-8662e41cda4c}">
           <p14:sldIdLst>
             <p14:sldId id="259"/>
           </p14:sldIdLst>
         </p14:section>
-        <p14:section name="Read-along" id="{79abb6c5-9541-a1d1-8ff9-21ae0c4914da}">
+        <p14:section name="Read-along" id="{bdfeea80-342d-006b-7dfa-223bd5e04536}">
           <p14:sldIdLst>
             <p14:sldId id="260"/>
             <p14:sldId id="261"/>
           </p14:sldIdLst>
         </p14:section>
-        <p14:section name="Teach" id="{62caa08b-393f-ad65-fd9b-5c8519e821ad}">
+        <p14:section name="Teach" id="{92c1f23d-181a-c32b-1c10-1a6661c717af}">
           <p14:sldIdLst>
             <p14:sldId id="262"/>
             <p14:sldId id="263"/>
@@ -158,7 +158,7 @@
             <p14:sldId id="267"/>
           </p14:sldIdLst>
         </p14:section>
-        <p14:section name="Routes" id="{60babe0c-8dee-aec8-6271-69bc33aa412d}">
+        <p14:section name="Routes" id="{328db42d-2b4b-f646-7162-bffa60968426}">
           <p14:sldIdLst>
             <p14:sldId id="268"/>
             <p14:sldId id="269"/>
@@ -166,12 +166,12 @@
             <p14:sldId id="271"/>
           </p14:sldIdLst>
         </p14:section>
-        <p14:section name="Close" id="{bebeee00-8f9d-1f3b-a7d7-47954196e5af}">
+        <p14:section name="Close" id="{fb441cb7-b785-a95b-1ffe-98fd77713586}">
           <p14:sldIdLst>
             <p14:sldId id="272"/>
           </p14:sldIdLst>
         </p14:section>
-        <p14:section name="Answers" id="{553d3fc2-010e-864e-ebb9-65c1b088c051}">
+        <p14:section name="Answers" id="{d103f85d-a7d8-4a58-c4ea-21f0fd5855c5}">
           <p14:sldIdLst>
             <p14:sldId id="273"/>
             <p14:sldId id="274"/>
